--- a/3eme/p1/seance1-diaporama.pptx
+++ b/3eme/p1/seance1-diaporama.pptx
@@ -513,7 +513,7 @@
           <a:p>
             <a:r>
               <a:rPr lang="en-US" dirty="0"/>
-              <a:t>Rester a la porte. Les binomes sont affiches. Appel a voix haute en regardant chaque eleve : c'est la premiere fois qu'ils entendent leur nom dans cette salle.</a:t>
+              <a:t>AVANT DE PROJETER : completez la premiere diapositive avec votre nom, votre groupe, votre salle, votre effectif et votre nombre de postes. Un fichier PowerPoint ne peut pas lire les reglages de la page Mes informations du site. Rester a la porte. Les binomes sont affiches. Appel a voix haute en regardant chaque eleve : c'est la premiere fois qu'ils entendent leur nom dans cette salle.</a:t>
             </a:r>
             <a:endParaRPr lang="en-US" dirty="0"/>
           </a:p>
@@ -1965,7 +1965,7 @@
                 <a:ea typeface="Calibri" pitchFamily="34" charset="-122"/>
                 <a:cs typeface="Calibri" pitchFamily="34" charset="-120"/>
               </a:rPr>
-              <a:t>Groupe 3M3 et 3M4 · salle AH13 · M. RAFALIARISON</a:t>
+              <a:t>Groupe ……… · salle ……… · ………</a:t>
             </a:r>
             <a:endParaRPr lang="en-US" sz="2000" dirty="0"/>
           </a:p>
@@ -2004,7 +2004,7 @@
                 <a:ea typeface="Calibri" pitchFamily="34" charset="-122"/>
                 <a:cs typeface="Calibri" pitchFamily="34" charset="-120"/>
               </a:rPr>
-              <a:t>17 élèves · 9 postes · 90 minutes</a:t>
+              <a:t>……… élèves · ……… postes · 90 minutes</a:t>
             </a:r>
             <a:endParaRPr lang="en-US" sz="1700" dirty="0"/>
           </a:p>
@@ -2282,7 +2282,7 @@
                 <a:ea typeface="Calibri" pitchFamily="34" charset="-122"/>
                 <a:cs typeface="Calibri" pitchFamily="34" charset="-120"/>
               </a:rPr>
-              <a:t>Technologie · 3e · jeudi 17 septembre 2026</a:t>
+              <a:t>Technologie · 3e · première séance</a:t>
             </a:r>
             <a:endParaRPr lang="en-US" sz="1000" dirty="0"/>
           </a:p>
@@ -2732,7 +2732,7 @@
                 <a:ea typeface="Calibri" pitchFamily="34" charset="-122"/>
                 <a:cs typeface="Calibri" pitchFamily="34" charset="-120"/>
               </a:rPr>
-              <a:t>Obligatoire en fin de 3e. Nous commencerons le parcours dès le 24 septembre.</a:t>
+              <a:t>Obligatoire en fin de 3e. Nous commencerons le parcours dès la séance suivante.</a:t>
             </a:r>
             <a:endParaRPr lang="en-US" sz="1400" dirty="0"/>
           </a:p>
@@ -3030,7 +3030,7 @@
                 <a:ea typeface="Calibri" pitchFamily="34" charset="-122"/>
                 <a:cs typeface="Calibri" pitchFamily="34" charset="-120"/>
               </a:rPr>
-              <a:t>Technologie · 3e · jeudi 17 septembre 2026</a:t>
+              <a:t>Technologie · 3e · première séance</a:t>
             </a:r>
             <a:endParaRPr lang="en-US" sz="1000" dirty="0"/>
           </a:p>
@@ -3761,7 +3761,7 @@
                 <a:ea typeface="Calibri" pitchFamily="34" charset="-122"/>
                 <a:cs typeface="Calibri" pitchFamily="34" charset="-120"/>
               </a:rPr>
-              <a:t>Jeudi 24 septembre</a:t>
+              <a:t>La séance suivante</a:t>
             </a:r>
             <a:endParaRPr lang="en-US" sz="2200" dirty="0"/>
           </a:p>
@@ -4053,7 +4053,7 @@
                 <a:ea typeface="Calibri" pitchFamily="34" charset="-122"/>
                 <a:cs typeface="Calibri" pitchFamily="34" charset="-120"/>
               </a:rPr>
-              <a:t>Technologie · 3e · jeudi 17 septembre 2026</a:t>
+              <a:t>Technologie · 3e · première séance</a:t>
             </a:r>
             <a:endParaRPr lang="en-US" sz="1000" dirty="0"/>
           </a:p>
@@ -4846,7 +4846,7 @@
                 <a:ea typeface="Calibri" pitchFamily="34" charset="-122"/>
                 <a:cs typeface="Calibri" pitchFamily="34" charset="-120"/>
               </a:rPr>
-              <a:t>Technologie · 3e · jeudi 17 septembre 2026</a:t>
+              <a:t>Technologie · 3e · première séance</a:t>
             </a:r>
             <a:endParaRPr lang="en-US" sz="1000" dirty="0"/>
           </a:p>
@@ -5184,7 +5184,7 @@
                 <a:ea typeface="Calibri" pitchFamily="34" charset="-122"/>
                 <a:cs typeface="Calibri" pitchFamily="34" charset="-120"/>
               </a:rPr>
-              <a:t>Technologie · 3e · jeudi 17 septembre 2026</a:t>
+              <a:t>Technologie · 3e · première séance</a:t>
             </a:r>
             <a:endParaRPr lang="en-US" sz="1000" dirty="0"/>
           </a:p>
@@ -6062,7 +6062,7 @@
                 <a:ea typeface="Calibri" pitchFamily="34" charset="-122"/>
                 <a:cs typeface="Calibri" pitchFamily="34" charset="-120"/>
               </a:rPr>
-              <a:t>Technologie · 3e · jeudi 17 septembre 2026</a:t>
+              <a:t>Technologie · 3e · première séance</a:t>
             </a:r>
             <a:endParaRPr lang="en-US" sz="1000" dirty="0"/>
           </a:p>
@@ -6521,7 +6521,7 @@
                 <a:ea typeface="Calibri" pitchFamily="34" charset="-122"/>
                 <a:cs typeface="Calibri" pitchFamily="34" charset="-120"/>
               </a:rPr>
-              <a:t>Technologie · 3e · jeudi 17 septembre 2026</a:t>
+              <a:t>Technologie · 3e · première séance</a:t>
             </a:r>
             <a:endParaRPr lang="en-US" sz="1000" dirty="0"/>
           </a:p>
@@ -7121,7 +7121,7 @@
                 <a:ea typeface="Calibri" pitchFamily="34" charset="-122"/>
                 <a:cs typeface="Calibri" pitchFamily="34" charset="-120"/>
               </a:rPr>
-              <a:t>Technologie · 3e · jeudi 17 septembre 2026</a:t>
+              <a:t>Technologie · 3e · première séance</a:t>
             </a:r>
             <a:endParaRPr lang="en-US" sz="1000" dirty="0"/>
           </a:p>
@@ -7916,7 +7916,7 @@
                 <a:ea typeface="Calibri" pitchFamily="34" charset="-122"/>
                 <a:cs typeface="Calibri" pitchFamily="34" charset="-120"/>
               </a:rPr>
-              <a:t>Technologie · 3e · jeudi 17 septembre 2026</a:t>
+              <a:t>Technologie · 3e · première séance</a:t>
             </a:r>
             <a:endParaRPr lang="en-US" sz="1000" dirty="0"/>
           </a:p>
@@ -8721,7 +8721,7 @@
                 <a:ea typeface="Calibri" pitchFamily="34" charset="-122"/>
                 <a:cs typeface="Calibri" pitchFamily="34" charset="-120"/>
               </a:rPr>
-              <a:t>Technologie · 3e · jeudi 17 septembre 2026</a:t>
+              <a:t>Technologie · 3e · première séance</a:t>
             </a:r>
             <a:endParaRPr lang="en-US" sz="1000" dirty="0"/>
           </a:p>
